--- a/For DBA/4. Транзакции/Postgresql управление состоянием СУБД.pptx
+++ b/For DBA/4. Транзакции/Postgresql управление состоянием СУБД.pptx
@@ -295,7 +295,7 @@
           <a:p>
             <a:fld id="{B4C71EC6-210F-42DE-9C53-41977AD35B3D}" type="datetimeFigureOut">
               <a:rPr lang="ru-RU" smtClean="0"/>
-              <a:t>13.09.2026</a:t>
+              <a:t>17.10.2026</a:t>
             </a:fld>
             <a:endParaRPr lang="ru-RU"/>
           </a:p>
@@ -460,7 +460,7 @@
           <a:p>
             <a:fld id="{B4C71EC6-210F-42DE-9C53-41977AD35B3D}" type="datetimeFigureOut">
               <a:rPr lang="ru-RU" smtClean="0"/>
-              <a:t>13.09.2026</a:t>
+              <a:t>17.10.2026</a:t>
             </a:fld>
             <a:endParaRPr lang="ru-RU"/>
           </a:p>
@@ -635,7 +635,7 @@
           <a:p>
             <a:fld id="{B4C71EC6-210F-42DE-9C53-41977AD35B3D}" type="datetimeFigureOut">
               <a:rPr lang="ru-RU" smtClean="0"/>
-              <a:t>13.09.2026</a:t>
+              <a:t>17.10.2026</a:t>
             </a:fld>
             <a:endParaRPr lang="ru-RU"/>
           </a:p>
@@ -800,7 +800,7 @@
           <a:p>
             <a:fld id="{B4C71EC6-210F-42DE-9C53-41977AD35B3D}" type="datetimeFigureOut">
               <a:rPr lang="ru-RU" smtClean="0"/>
-              <a:t>13.09.2026</a:t>
+              <a:t>17.10.2026</a:t>
             </a:fld>
             <a:endParaRPr lang="ru-RU"/>
           </a:p>
@@ -1041,7 +1041,7 @@
           <a:p>
             <a:fld id="{B4C71EC6-210F-42DE-9C53-41977AD35B3D}" type="datetimeFigureOut">
               <a:rPr lang="ru-RU" smtClean="0"/>
-              <a:t>13.09.2026</a:t>
+              <a:t>17.10.2026</a:t>
             </a:fld>
             <a:endParaRPr lang="ru-RU"/>
           </a:p>
@@ -1324,7 +1324,7 @@
           <a:p>
             <a:fld id="{B4C71EC6-210F-42DE-9C53-41977AD35B3D}" type="datetimeFigureOut">
               <a:rPr lang="ru-RU" smtClean="0"/>
-              <a:t>13.09.2026</a:t>
+              <a:t>17.10.2026</a:t>
             </a:fld>
             <a:endParaRPr lang="ru-RU"/>
           </a:p>
@@ -1741,7 +1741,7 @@
           <a:p>
             <a:fld id="{B4C71EC6-210F-42DE-9C53-41977AD35B3D}" type="datetimeFigureOut">
               <a:rPr lang="ru-RU" smtClean="0"/>
-              <a:t>13.09.2026</a:t>
+              <a:t>17.10.2026</a:t>
             </a:fld>
             <a:endParaRPr lang="ru-RU"/>
           </a:p>
@@ -1854,7 +1854,7 @@
           <a:p>
             <a:fld id="{B4C71EC6-210F-42DE-9C53-41977AD35B3D}" type="datetimeFigureOut">
               <a:rPr lang="ru-RU" smtClean="0"/>
-              <a:t>13.09.2026</a:t>
+              <a:t>17.10.2026</a:t>
             </a:fld>
             <a:endParaRPr lang="ru-RU"/>
           </a:p>
@@ -1944,7 +1944,7 @@
           <a:p>
             <a:fld id="{B4C71EC6-210F-42DE-9C53-41977AD35B3D}" type="datetimeFigureOut">
               <a:rPr lang="ru-RU" smtClean="0"/>
-              <a:t>13.09.2026</a:t>
+              <a:t>17.10.2026</a:t>
             </a:fld>
             <a:endParaRPr lang="ru-RU"/>
           </a:p>
@@ -2216,7 +2216,7 @@
           <a:p>
             <a:fld id="{B4C71EC6-210F-42DE-9C53-41977AD35B3D}" type="datetimeFigureOut">
               <a:rPr lang="ru-RU" smtClean="0"/>
-              <a:t>13.09.2026</a:t>
+              <a:t>17.10.2026</a:t>
             </a:fld>
             <a:endParaRPr lang="ru-RU"/>
           </a:p>
@@ -2464,7 +2464,7 @@
           <a:p>
             <a:fld id="{B4C71EC6-210F-42DE-9C53-41977AD35B3D}" type="datetimeFigureOut">
               <a:rPr lang="ru-RU" smtClean="0"/>
-              <a:t>13.09.2026</a:t>
+              <a:t>17.10.2026</a:t>
             </a:fld>
             <a:endParaRPr lang="ru-RU"/>
           </a:p>
@@ -2672,7 +2672,7 @@
           <a:p>
             <a:fld id="{B4C71EC6-210F-42DE-9C53-41977AD35B3D}" type="datetimeFigureOut">
               <a:rPr lang="ru-RU" smtClean="0"/>
-              <a:t>13.09.2026</a:t>
+              <a:t>17.10.2026</a:t>
             </a:fld>
             <a:endParaRPr lang="ru-RU"/>
           </a:p>
@@ -3058,22 +3058,62 @@
           <a:lstStyle/>
           <a:p>
             <a:r>
-              <a:rPr lang="en-US" dirty="0" err="1" smtClean="0"/>
+              <a:rPr lang="en-US" dirty="0" err="1" smtClean="0">
+                <a:effectLst>
+                  <a:outerShdw blurRad="38100" dist="38100" dir="2700000" algn="tl">
+                    <a:srgbClr val="000000">
+                      <a:alpha val="43137"/>
+                    </a:srgbClr>
+                  </a:outerShdw>
+                </a:effectLst>
+              </a:rPr>
               <a:t>Postgresql</a:t>
             </a:r>
             <a:r>
-              <a:rPr lang="ru-RU" dirty="0" smtClean="0"/>
+              <a:rPr lang="ru-RU" dirty="0" smtClean="0">
+                <a:effectLst>
+                  <a:outerShdw blurRad="38100" dist="38100" dir="2700000" algn="tl">
+                    <a:srgbClr val="000000">
+                      <a:alpha val="43137"/>
+                    </a:srgbClr>
+                  </a:outerShdw>
+                </a:effectLst>
+              </a:rPr>
               <a:t>:</a:t>
             </a:r>
             <a:r>
-              <a:rPr lang="en-US" dirty="0" smtClean="0"/>
+              <a:rPr lang="en-US" dirty="0" smtClean="0">
+                <a:effectLst>
+                  <a:outerShdw blurRad="38100" dist="38100" dir="2700000" algn="tl">
+                    <a:srgbClr val="000000">
+                      <a:alpha val="43137"/>
+                    </a:srgbClr>
+                  </a:outerShdw>
+                </a:effectLst>
+              </a:rPr>
               <a:t> </a:t>
             </a:r>
             <a:r>
-              <a:rPr lang="ru-RU" i="1" dirty="0" smtClean="0"/>
+              <a:rPr lang="ru-RU" dirty="0" smtClean="0">
+                <a:effectLst>
+                  <a:outerShdw blurRad="38100" dist="38100" dir="2700000" algn="tl">
+                    <a:srgbClr val="000000">
+                      <a:alpha val="43137"/>
+                    </a:srgbClr>
+                  </a:outerShdw>
+                </a:effectLst>
+              </a:rPr>
               <a:t>транзакции</a:t>
             </a:r>
-            <a:endParaRPr lang="ru-RU" i="1" dirty="0"/>
+            <a:endParaRPr lang="ru-RU" dirty="0">
+              <a:effectLst>
+                <a:outerShdw blurRad="38100" dist="38100" dir="2700000" algn="tl">
+                  <a:srgbClr val="000000">
+                    <a:alpha val="43137"/>
+                  </a:srgbClr>
+                </a:outerShdw>
+              </a:effectLst>
+            </a:endParaRPr>
           </a:p>
         </p:txBody>
       </p:sp>
